--- a/companies/calderwood-partners/Engagements/Hughes Group/2008.07.13 - Briefing Deck - Hughes Group.pptx
+++ b/companies/calderwood-partners/Engagements/Hughes Group/2008.07.13 - Briefing Deck - Hughes Group.pptx
@@ -3139,27 +3139,9 @@
             </a:r>
           </a:p>
           <a:p>
-            <a:pPr lvl="1"/>
-            <a:r>
-              <a:t>A progress briefing for Linda Gallegos, Chief Financial Officer</a:t>
-            </a:r>
-          </a:p>
-          <a:p>
-            <a:pPr lvl="1"/>
-            <a:r>
-              <a:t>Engagement commenced May 18, 2008</a:t>
-            </a:r>
-          </a:p>
-          <a:p>
-            <a:pPr lvl="1"/>
-            <a:r>
-              <a:t>Presented by Jason Torres, Principal</a:t>
-            </a:r>
-          </a:p>
-          <a:p>
-            <a:pPr lvl="1"/>
-            <a:r>
-              <a:t>Prepared by the engagement team for the client's review</a:t>
+            <a:pPr/>
+            <a:r>
+              <a:t>A progress briefing for the client sponsor, prepared by the engagement team. The engagement commenced May 18, 2008 and is scoped to run about eight months; this briefing covers the opening phase of the work.</a:t>
             </a:r>
           </a:p>
         </p:txBody>
@@ -3203,7 +3185,7 @@
                   <a:srgbClr val="4A2E2A"/>
                 </a:solidFill>
               </a:rPr>
-              <a:t>What We Were Asked To Do</a:t>
+              <a:t>Where the work stands</a:t>
             </a:r>
           </a:p>
         </p:txBody>
@@ -3225,25 +3207,19 @@
           <a:p>
             <a:pPr lvl="1"/>
             <a:r>
-              <a:t>Redesign how the company is organized to run: structure, decision rights, and the cost that structure carries</a:t>
+              <a:t>We are in the opening phase: mapping how the organization runs today before proposing any change to it.</a:t>
             </a:r>
           </a:p>
           <a:p>
             <a:pPr lvl="1"/>
             <a:r>
-              <a:t>Diagnose the current operating model from the charts, the management accounts, and the leadership interviews</a:t>
+              <a:t>The core processes are being traced end to end, with particular attention to where decisions are made and where they stall.</a:t>
             </a:r>
           </a:p>
           <a:p>
             <a:pPr lvl="1"/>
             <a:r>
-              <a:t>Design a target model built for where the business is going, not for where it has been</a:t>
-            </a:r>
-          </a:p>
-          <a:p>
-            <a:pPr lvl="1"/>
-            <a:r>
-              <a:t>Lay out a roadmap that sequences the change and shows where the return is largest</a:t>
+              <a:t>First data requests are out to the client finance team, and the cost picture is being assembled behind the process map.</a:t>
             </a:r>
           </a:p>
         </p:txBody>
@@ -3287,7 +3263,7 @@
                   <a:srgbClr val="4A2E2A"/>
                 </a:solidFill>
               </a:rPr>
-              <a:t>How We Are Working</a:t>
+              <a:t>What the baseline is beginning to show</a:t>
             </a:r>
           </a:p>
         </p:txBody>
@@ -3309,31 +3285,19 @@
           <a:p>
             <a:pPr lvl="1"/>
             <a:r>
-              <a:t>We start from your own charts and management accounts, not from a template</a:t>
+              <a:t>The documented process and the process as actually run differ in a few predictable places, and that gap is where most of the friction sits.</a:t>
             </a:r>
           </a:p>
           <a:p>
             <a:pPr lvl="1"/>
             <a:r>
-              <a:t>Brenda Rodriguez leads the cost baseline and the current-state map</a:t>
+              <a:t>Accountability for several core results is split across functions, so no single owner sees a result from end to end.</a:t>
             </a:r>
           </a:p>
           <a:p>
             <a:pPr lvl="1"/>
             <a:r>
-              <a:t>Interviews with the business-unit heads run through the on-site weeks</a:t>
-            </a:r>
-          </a:p>
-          <a:p>
-            <a:pPr lvl="1"/>
-            <a:r>
-              <a:t>The cost baseline is built by function and by layer, so spend can be read against the structure that drives it</a:t>
-            </a:r>
-          </a:p>
-          <a:p>
-            <a:pPr lvl="1"/>
-            <a:r>
-              <a:t>Every number we show you ties back to one your finance team already recognizes</a:t>
+              <a:t>A shared cost center currently masks how two support functions consume resources; we are working with finance to separate them.</a:t>
             </a:r>
           </a:p>
         </p:txBody>
@@ -3377,7 +3341,7 @@
                   <a:srgbClr val="4A2E2A"/>
                 </a:solidFill>
               </a:rPr>
-              <a:t>What We Are Hearing</a:t>
+              <a:t>The questions the redesign has to answer</a:t>
             </a:r>
           </a:p>
         </p:txBody>
@@ -3399,25 +3363,19 @@
           <a:p>
             <a:pPr lvl="1"/>
             <a:r>
-              <a:t>Leaders describe the same decision being made in more than one place, and then reconciled later</a:t>
+              <a:t>Where should decision rights sit, so that the people accountable for a result also control it?</a:t>
             </a:r>
           </a:p>
           <a:p>
             <a:pPr lvl="1"/>
             <a:r>
-              <a:t>The cost of coordinating across the structure shows up as meetings and rework, not as a line on the accounts</a:t>
+              <a:t>Which activities belong together in the model, and which are grouped that way only by history?</a:t>
             </a:r>
           </a:p>
           <a:p>
             <a:pPr lvl="1"/>
             <a:r>
-              <a:t>Accountability that is clearly held moves work faster than accountability shared across several roles</a:t>
-            </a:r>
-          </a:p>
-          <a:p>
-            <a:pPr lvl="1"/>
-            <a:r>
-              <a:t>These are themes from the interviews so far, offered as observations and not yet as findings</a:t>
+              <a:t>What can the organization operate for itself once we have gone, as against what looks good only on paper?</a:t>
             </a:r>
           </a:p>
         </p:txBody>
@@ -3461,7 +3419,7 @@
                   <a:srgbClr val="4A2E2A"/>
                 </a:solidFill>
               </a:rPr>
-              <a:t>Where the Work Stands</a:t>
+              <a:t>Your account team</a:t>
             </a:r>
           </a:p>
         </p:txBody>
@@ -3483,31 +3441,19 @@
           <a:p>
             <a:pPr lvl="1"/>
             <a:r>
-              <a:t>Organization charts and management accounts received and reconciled</a:t>
+              <a:t>Jason Torres, Principal, holds the relationship and owns what we deliver.</a:t>
             </a:r>
           </a:p>
           <a:p>
             <a:pPr lvl="1"/>
             <a:r>
-              <a:t>Cost baseline for Hughes Group built by function; the layer view is in progress</a:t>
+              <a:t>Brenda Rodriguez, Senior Consultant, leads the analysis and the operating and cost picture.</a:t>
             </a:r>
           </a:p>
           <a:p>
             <a:pPr lvl="1"/>
             <a:r>
-              <a:t>Leadership interviews under way, roughly half complete</a:t>
-            </a:r>
-          </a:p>
-          <a:p>
-            <a:pPr lvl="1"/>
-            <a:r>
-              <a:t>Early pattern: decisions and cost do not sit in the same place, and we are testing how far that goes</a:t>
-            </a:r>
-          </a:p>
-          <a:p>
-            <a:pPr lvl="1"/>
-            <a:r>
-              <a:t>No target structure is on the table yet, and none should be inferred from this briefing</a:t>
+              <a:t>Linda Gallegos, Chief Financial Officer, is our sponsor on the client side and our point of contact.</a:t>
             </a:r>
           </a:p>
         </p:txBody>
@@ -3551,7 +3497,7 @@
                   <a:srgbClr val="4A2E2A"/>
                 </a:solidFill>
               </a:rPr>
-              <a:t>What Comes Next</a:t>
+              <a:t>What happens next</a:t>
             </a:r>
           </a:p>
         </p:txBody>
@@ -3573,25 +3519,19 @@
           <a:p>
             <a:pPr lvl="1"/>
             <a:r>
-              <a:t>Finish the interviews and close the cost baseline</a:t>
+              <a:t>Close out the baseline and the cost picture over the coming weeks.</a:t>
             </a:r>
           </a:p>
           <a:p>
             <a:pPr lvl="1"/>
             <a:r>
-              <a:t>Frame two or three target-model options for discussion, not for decision</a:t>
+              <a:t>Shape two or three candidate models and test each against the baseline for what it costs and what it changes.</a:t>
             </a:r>
           </a:p>
           <a:p>
             <a:pPr lvl="1"/>
             <a:r>
-              <a:t>Bring the diagnostic findings to the next working session</a:t>
-            </a:r>
-          </a:p>
-          <a:p>
-            <a:pPr lvl="1"/>
-            <a:r>
-              <a:t>Questions to Jason Torres; data questions direct to Brenda Rodriguez</a:t>
+              <a:t>Return to you with the options and their trade-offs before any direction is fixed.</a:t>
             </a:r>
           </a:p>
         </p:txBody>
